--- a/@Materi Kuliah/Materi_Statistika_Nonparametrik_Pemodelan_Fleksibel/Presentasi_Statistika_Nonparametrik_Pemodelan_Fleksibel_Profesional_dari_HTML.pptx
+++ b/@Materi Kuliah/Materi_Statistika_Nonparametrik_Pemodelan_Fleksibel/Presentasi_Statistika_Nonparametrik_Pemodelan_Fleksibel_Profesional_dari_HTML.pptx
@@ -2,131 +2,36 @@
 <file path=ppt/presentation.xml><?xml version="1.0" encoding="utf-8"?>
 <p:presentation xmlns:p="http://schemas.openxmlformats.org/presentationml/2006/main">
   <p:sldMasterIdLst>
-    <p:sldMasterId xmlns:r="http://schemas.openxmlformats.org/officeDocument/2006/relationships" id="2147483648" r:id="R5c7f24715ec34287"/>
+    <p:sldMasterId xmlns:r="http://schemas.openxmlformats.org/officeDocument/2006/relationships" id="2147483648" r:id="R0d587f9b033b4889"/>
   </p:sldMasterIdLst>
   <p:notesMasterIdLst>
-    <p:notesMasterId xmlns:r="http://schemas.openxmlformats.org/officeDocument/2006/relationships" r:id="Re3ab86e57563420a"/>
+    <p:notesMasterId xmlns:r="http://schemas.openxmlformats.org/officeDocument/2006/relationships" r:id="R3fec1dc685874aa3"/>
   </p:notesMasterIdLst>
   <p:sldIdLst>
-    <p:sldId xmlns:r="http://schemas.openxmlformats.org/officeDocument/2006/relationships" id="256" r:id="R8234f747f92f4045"/>
-    <p:sldId xmlns:r="http://schemas.openxmlformats.org/officeDocument/2006/relationships" id="257" r:id="Rc9e700d6dceb4478"/>
-    <p:sldId xmlns:r="http://schemas.openxmlformats.org/officeDocument/2006/relationships" id="258" r:id="R9c4a75ce359e4bde"/>
-    <p:sldId xmlns:r="http://schemas.openxmlformats.org/officeDocument/2006/relationships" id="259" r:id="Ra48805f752574142"/>
-    <p:sldId xmlns:r="http://schemas.openxmlformats.org/officeDocument/2006/relationships" id="260" r:id="Rb4557da706334094"/>
-    <p:sldId xmlns:r="http://schemas.openxmlformats.org/officeDocument/2006/relationships" id="261" r:id="R1f41413690394290"/>
-    <p:sldId xmlns:r="http://schemas.openxmlformats.org/officeDocument/2006/relationships" id="262" r:id="R2bfe376c0efb42d7"/>
-    <p:sldId xmlns:r="http://schemas.openxmlformats.org/officeDocument/2006/relationships" id="263" r:id="R99971787f56f4e6a"/>
-    <p:sldId xmlns:r="http://schemas.openxmlformats.org/officeDocument/2006/relationships" id="264" r:id="R08c9241a847f40e0"/>
-    <p:sldId xmlns:r="http://schemas.openxmlformats.org/officeDocument/2006/relationships" id="265" r:id="Ra09ea894b30b4a49"/>
-    <p:sldId xmlns:r="http://schemas.openxmlformats.org/officeDocument/2006/relationships" id="266" r:id="R9e5105f700f24d48"/>
-    <p:sldId xmlns:r="http://schemas.openxmlformats.org/officeDocument/2006/relationships" id="267" r:id="Rb015cf45f09d4406"/>
-    <p:sldId xmlns:r="http://schemas.openxmlformats.org/officeDocument/2006/relationships" id="268" r:id="Rf342ebf70d084bb2"/>
-    <p:sldId xmlns:r="http://schemas.openxmlformats.org/officeDocument/2006/relationships" id="269" r:id="R2d48a52ec14a407d"/>
-    <p:sldId xmlns:r="http://schemas.openxmlformats.org/officeDocument/2006/relationships" id="270" r:id="R5d5ba26e822a4133"/>
-    <p:sldId xmlns:r="http://schemas.openxmlformats.org/officeDocument/2006/relationships" id="271" r:id="Rbe7e15d84f714c5c"/>
-    <p:sldId xmlns:r="http://schemas.openxmlformats.org/officeDocument/2006/relationships" id="272" r:id="Rf307dc83ff9f4ff4"/>
-    <p:sldId xmlns:r="http://schemas.openxmlformats.org/officeDocument/2006/relationships" id="273" r:id="R68531449f446459e"/>
-    <p:sldId xmlns:r="http://schemas.openxmlformats.org/officeDocument/2006/relationships" id="274" r:id="R6bac7c5ae45b411d"/>
-    <p:sldId xmlns:r="http://schemas.openxmlformats.org/officeDocument/2006/relationships" id="275" r:id="Ra361d0e8b3564837"/>
-    <p:sldId xmlns:r="http://schemas.openxmlformats.org/officeDocument/2006/relationships" id="276" r:id="R8187a85f8e88404c"/>
+    <p:sldId xmlns:r="http://schemas.openxmlformats.org/officeDocument/2006/relationships" id="256" r:id="R730d08946b974c8c"/>
+    <p:sldId xmlns:r="http://schemas.openxmlformats.org/officeDocument/2006/relationships" id="257" r:id="R679eeb7dc13a449c"/>
+    <p:sldId xmlns:r="http://schemas.openxmlformats.org/officeDocument/2006/relationships" id="258" r:id="R3dd7e10f56574afd"/>
+    <p:sldId xmlns:r="http://schemas.openxmlformats.org/officeDocument/2006/relationships" id="259" r:id="R7918c29258bb4246"/>
+    <p:sldId xmlns:r="http://schemas.openxmlformats.org/officeDocument/2006/relationships" id="260" r:id="Rfcfd2cac60484812"/>
+    <p:sldId xmlns:r="http://schemas.openxmlformats.org/officeDocument/2006/relationships" id="261" r:id="Re344f430e84c4f8a"/>
+    <p:sldId xmlns:r="http://schemas.openxmlformats.org/officeDocument/2006/relationships" id="262" r:id="R345cd2c3164a4f15"/>
+    <p:sldId xmlns:r="http://schemas.openxmlformats.org/officeDocument/2006/relationships" id="263" r:id="R269698bb41ce4536"/>
+    <p:sldId xmlns:r="http://schemas.openxmlformats.org/officeDocument/2006/relationships" id="264" r:id="R5fb426ccb8364cbd"/>
+    <p:sldId xmlns:r="http://schemas.openxmlformats.org/officeDocument/2006/relationships" id="265" r:id="R787584d5db3d4681"/>
+    <p:sldId xmlns:r="http://schemas.openxmlformats.org/officeDocument/2006/relationships" id="266" r:id="R4805317b4dc64cce"/>
+    <p:sldId xmlns:r="http://schemas.openxmlformats.org/officeDocument/2006/relationships" id="267" r:id="R15e1245767d54552"/>
+    <p:sldId xmlns:r="http://schemas.openxmlformats.org/officeDocument/2006/relationships" id="268" r:id="R533e14e47ab748f1"/>
+    <p:sldId xmlns:r="http://schemas.openxmlformats.org/officeDocument/2006/relationships" id="269" r:id="Rb172e612dd0e4488"/>
+    <p:sldId xmlns:r="http://schemas.openxmlformats.org/officeDocument/2006/relationships" id="270" r:id="R3a134078ed854d3c"/>
+    <p:sldId xmlns:r="http://schemas.openxmlformats.org/officeDocument/2006/relationships" id="271" r:id="Rccd0cde8893e4b60"/>
+    <p:sldId xmlns:r="http://schemas.openxmlformats.org/officeDocument/2006/relationships" id="272" r:id="R45dffca921f242b5"/>
+    <p:sldId xmlns:r="http://schemas.openxmlformats.org/officeDocument/2006/relationships" id="273" r:id="R85e4671e094e4d83"/>
+    <p:sldId xmlns:r="http://schemas.openxmlformats.org/officeDocument/2006/relationships" id="274" r:id="Rf4e7d9aafbdd4b1a"/>
+    <p:sldId xmlns:r="http://schemas.openxmlformats.org/officeDocument/2006/relationships" id="275" r:id="R28c2e1baafba4460"/>
+    <p:sldId xmlns:r="http://schemas.openxmlformats.org/officeDocument/2006/relationships" id="276" r:id="R1f025302950e4305"/>
   </p:sldIdLst>
   <p:sldSz cx="12192000" cy="6858000"/>
   <p:notesSz cx="6858000" cy="9144000"/>
-  <p:defaultTextStyle>
-    <a:defPPr xmlns:a="http://schemas.openxmlformats.org/drawingml/2006/main">
-      <a:defRPr lang="en-US"/>
-    </a:defPPr>
-    <a:lvl1pPr xmlns:a="http://schemas.openxmlformats.org/drawingml/2006/main" marL="0" indent="0" algn="l" defTabSz="914400">
-      <a:defRPr sz="1800" kern="1200">
-        <a:solidFill>
-          <a:schemeClr val="tx1"/>
-        </a:solidFill>
-        <a:latin typeface="+mn-lt"/>
-        <a:ea typeface="+mn-ea"/>
-        <a:cs typeface="+mn-cs"/>
-      </a:defRPr>
-    </a:lvl1pPr>
-    <a:lvl2pPr xmlns:a="http://schemas.openxmlformats.org/drawingml/2006/main" marL="457200" indent="0" algn="l" defTabSz="914400">
-      <a:defRPr sz="1800" kern="1200">
-        <a:solidFill>
-          <a:schemeClr val="tx1"/>
-        </a:solidFill>
-        <a:latin typeface="+mn-lt"/>
-        <a:ea typeface="+mn-ea"/>
-        <a:cs typeface="+mn-cs"/>
-      </a:defRPr>
-    </a:lvl2pPr>
-    <a:lvl3pPr xmlns:a="http://schemas.openxmlformats.org/drawingml/2006/main" marL="914400" indent="0" algn="l" defTabSz="914400">
-      <a:defRPr sz="1800" kern="1200">
-        <a:solidFill>
-          <a:schemeClr val="tx1"/>
-        </a:solidFill>
-        <a:latin typeface="+mn-lt"/>
-        <a:ea typeface="+mn-ea"/>
-        <a:cs typeface="+mn-cs"/>
-      </a:defRPr>
-    </a:lvl3pPr>
-    <a:lvl4pPr xmlns:a="http://schemas.openxmlformats.org/drawingml/2006/main" marL="1371600" indent="0" algn="l" defTabSz="914400">
-      <a:defRPr sz="1800" kern="1200">
-        <a:solidFill>
-          <a:schemeClr val="tx1"/>
-        </a:solidFill>
-        <a:latin typeface="+mn-lt"/>
-        <a:ea typeface="+mn-ea"/>
-        <a:cs typeface="+mn-cs"/>
-      </a:defRPr>
-    </a:lvl4pPr>
-    <a:lvl5pPr xmlns:a="http://schemas.openxmlformats.org/drawingml/2006/main" marL="1828800" indent="0" algn="l" defTabSz="914400">
-      <a:defRPr sz="1800" kern="1200">
-        <a:solidFill>
-          <a:schemeClr val="tx1"/>
-        </a:solidFill>
-        <a:latin typeface="+mn-lt"/>
-        <a:ea typeface="+mn-ea"/>
-        <a:cs typeface="+mn-cs"/>
-      </a:defRPr>
-    </a:lvl5pPr>
-    <a:lvl6pPr xmlns:a="http://schemas.openxmlformats.org/drawingml/2006/main" marL="2286000" indent="0" algn="l" defTabSz="914400">
-      <a:defRPr sz="1800" kern="1200">
-        <a:solidFill>
-          <a:schemeClr val="tx1"/>
-        </a:solidFill>
-        <a:latin typeface="+mn-lt"/>
-        <a:ea typeface="+mn-ea"/>
-        <a:cs typeface="+mn-cs"/>
-      </a:defRPr>
-    </a:lvl6pPr>
-    <a:lvl7pPr xmlns:a="http://schemas.openxmlformats.org/drawingml/2006/main" marL="2743200" indent="0" algn="l" defTabSz="914400">
-      <a:defRPr sz="1800" kern="1200">
-        <a:solidFill>
-          <a:schemeClr val="tx1"/>
-        </a:solidFill>
-        <a:latin typeface="+mn-lt"/>
-        <a:ea typeface="+mn-ea"/>
-        <a:cs typeface="+mn-cs"/>
-      </a:defRPr>
-    </a:lvl7pPr>
-    <a:lvl8pPr xmlns:a="http://schemas.openxmlformats.org/drawingml/2006/main" marL="3200400" indent="0" algn="l" defTabSz="914400">
-      <a:defRPr sz="1800" kern="1200">
-        <a:solidFill>
-          <a:schemeClr val="tx1"/>
-        </a:solidFill>
-        <a:latin typeface="+mn-lt"/>
-        <a:ea typeface="+mn-ea"/>
-        <a:cs typeface="+mn-cs"/>
-      </a:defRPr>
-    </a:lvl8pPr>
-    <a:lvl9pPr xmlns:a="http://schemas.openxmlformats.org/drawingml/2006/main" marL="3657600" indent="0" algn="l" defTabSz="914400">
-      <a:defRPr sz="1800" kern="1200">
-        <a:solidFill>
-          <a:schemeClr val="tx1"/>
-        </a:solidFill>
-        <a:latin typeface="+mn-lt"/>
-        <a:ea typeface="+mn-ea"/>
-        <a:cs typeface="+mn-cs"/>
-      </a:defRPr>
-    </a:lvl9pPr>
-  </p:defaultTextStyle>
 </p:presentation>
 </file>
 
@@ -1453,7 +1358,26 @@
         <p:txBody>
           <a:bodyPr xmlns:a="http://schemas.openxmlformats.org/drawingml/2006/main"/>
           <a:lstStyle xmlns:a="http://schemas.openxmlformats.org/drawingml/2006/main"/>
-          <a:p xmlns:a="http://schemas.openxmlformats.org/drawingml/2006/main"/>
+          <a:p xmlns:a="http://schemas.openxmlformats.org/drawingml/2006/main">
+            <a:r>
+              <a:t>[Sources]</a:t>
+            </a:r>
+          </a:p>
+          <a:p xmlns:a="http://schemas.openxmlformats.org/drawingml/2006/main">
+            <a:r>
+              <a:t>- RPS mata kuliah Revisi AI 2026, Program Studi S2 Statistika Terapan FMIPA Universitas Padjadjaran.</a:t>
+            </a:r>
+          </a:p>
+          <a:p xmlns:a="http://schemas.openxmlformats.org/drawingml/2006/main">
+            <a:r>
+              <a:t>[/Sources]</a:t>
+            </a:r>
+          </a:p>
+          <a:p xmlns:a="http://schemas.openxmlformats.org/drawingml/2006/main">
+            <a:r>
+              <a:t>Penutup: CPL tetap. AI adalah akselerator ketercapaian CPMK/Sub-CPMK, bukan pengganti penalaran statistika. Tekankan kewajiban prompt log ringkas, sumber, kode/notebook reproducible, validasi, dan audit trail.</a:t>
+            </a:r>
+          </a:p>
         </p:txBody>
       </p:sp>
       <p:sp>
@@ -2010,8 +1934,8 @@
   </p:cSld>
   <p:clrMap bg1="lt1" tx1="dk1" bg2="lt2" tx2="dk2" accent1="accent1" accent2="accent2" accent3="accent3" accent4="accent4" accent5="accent5" accent6="accent6" hlink="hlink" folHlink="folHlink"/>
   <p:sldLayoutIdLst>
-    <p:sldLayoutId xmlns:r="http://schemas.openxmlformats.org/officeDocument/2006/relationships" id="2147483649" r:id="R45fcb16a99324d57"/>
-    <p:sldLayoutId xmlns:r="http://schemas.openxmlformats.org/officeDocument/2006/relationships" id="2147483650" r:id="R6e0aa0ae4ce54027"/>
+    <p:sldLayoutId xmlns:r="http://schemas.openxmlformats.org/officeDocument/2006/relationships" id="2147483649" r:id="R160563d4d1c14f33"/>
+    <p:sldLayoutId xmlns:r="http://schemas.openxmlformats.org/officeDocument/2006/relationships" id="2147483650" r:id="Re3efb48a06f24daa"/>
   </p:sldLayoutIdLst>
   <p:hf sldNum="0" hdr="0" ftr="0" dt="0"/>
   <p:txStyles>
@@ -2577,7 +2501,7 @@
           <p:nvPr/>
         </p:nvPicPr>
         <p:blipFill>
-          <a:blip xmlns:r="http://schemas.openxmlformats.org/officeDocument/2006/relationships" xmlns:a="http://schemas.openxmlformats.org/drawingml/2006/main" r:embed="R9073e7b6c4c54f3d"/>
+          <a:blip xmlns:r="http://schemas.openxmlformats.org/officeDocument/2006/relationships" xmlns:a="http://schemas.openxmlformats.org/drawingml/2006/main" r:embed="R5e867253444b4269"/>
           <a:stretch xmlns:a="http://schemas.openxmlformats.org/drawingml/2006/main">
             <a:fillRect l="0" t="0" r="0" b="0"/>
           </a:stretch>
@@ -2723,7 +2647,7 @@
           <p:nvPr/>
         </p:nvPicPr>
         <p:blipFill>
-          <a:blip xmlns:r="http://schemas.openxmlformats.org/officeDocument/2006/relationships" xmlns:a="http://schemas.openxmlformats.org/drawingml/2006/main" r:embed="R80902c624a04471f"/>
+          <a:blip xmlns:r="http://schemas.openxmlformats.org/officeDocument/2006/relationships" xmlns:a="http://schemas.openxmlformats.org/drawingml/2006/main" r:embed="R67f0477ebb3545e1"/>
           <a:stretch xmlns:a="http://schemas.openxmlformats.org/drawingml/2006/main">
             <a:fillRect l="0" t="0" r="0" b="0"/>
           </a:stretch>
@@ -3345,7 +3269,7 @@
           <p:nvPr/>
         </p:nvPicPr>
         <p:blipFill>
-          <a:blip xmlns:r="http://schemas.openxmlformats.org/officeDocument/2006/relationships" xmlns:a="http://schemas.openxmlformats.org/drawingml/2006/main" r:embed="R6720f81555844def"/>
+          <a:blip xmlns:r="http://schemas.openxmlformats.org/officeDocument/2006/relationships" xmlns:a="http://schemas.openxmlformats.org/drawingml/2006/main" r:embed="R752d87363e3946e1"/>
           <a:stretch xmlns:a="http://schemas.openxmlformats.org/drawingml/2006/main">
             <a:fillRect l="0" t="0" r="0" b="0"/>
           </a:stretch>
@@ -5495,7 +5419,7 @@
           <p:nvPr/>
         </p:nvPicPr>
         <p:blipFill>
-          <a:blip xmlns:r="http://schemas.openxmlformats.org/officeDocument/2006/relationships" xmlns:a="http://schemas.openxmlformats.org/drawingml/2006/main" r:embed="R5de14f716a3c495d"/>
+          <a:blip xmlns:r="http://schemas.openxmlformats.org/officeDocument/2006/relationships" xmlns:a="http://schemas.openxmlformats.org/drawingml/2006/main" r:embed="R990e3cca14644d75"/>
           <a:stretch xmlns:a="http://schemas.openxmlformats.org/drawingml/2006/main">
             <a:fillRect l="0" t="0" r="0" b="0"/>
           </a:stretch>
@@ -5774,7 +5698,7 @@
           <p:nvPr/>
         </p:nvPicPr>
         <p:blipFill>
-          <a:blip xmlns:r="http://schemas.openxmlformats.org/officeDocument/2006/relationships" xmlns:a="http://schemas.openxmlformats.org/drawingml/2006/main" r:embed="Rd17cc61d97714303"/>
+          <a:blip xmlns:r="http://schemas.openxmlformats.org/officeDocument/2006/relationships" xmlns:a="http://schemas.openxmlformats.org/drawingml/2006/main" r:embed="R505c3e3a1fee47e4"/>
           <a:stretch xmlns:a="http://schemas.openxmlformats.org/drawingml/2006/main">
             <a:fillRect l="0" t="0" r="0" b="0"/>
           </a:stretch>
@@ -7308,7 +7232,7 @@
           <p:nvPr/>
         </p:nvPicPr>
         <p:blipFill>
-          <a:blip xmlns:r="http://schemas.openxmlformats.org/officeDocument/2006/relationships" xmlns:a="http://schemas.openxmlformats.org/drawingml/2006/main" r:embed="Rdf4ca07fa3a34415"/>
+          <a:blip xmlns:r="http://schemas.openxmlformats.org/officeDocument/2006/relationships" xmlns:a="http://schemas.openxmlformats.org/drawingml/2006/main" r:embed="R9bc05f5b66124eb7"/>
           <a:stretch xmlns:a="http://schemas.openxmlformats.org/drawingml/2006/main">
             <a:fillRect l="0" t="0" r="0" b="0"/>
           </a:stretch>
@@ -8477,7 +8401,7 @@
           <p:nvPr/>
         </p:nvPicPr>
         <p:blipFill>
-          <a:blip xmlns:r="http://schemas.openxmlformats.org/officeDocument/2006/relationships" xmlns:a="http://schemas.openxmlformats.org/drawingml/2006/main" r:embed="Ra808eb2453e04087"/>
+          <a:blip xmlns:r="http://schemas.openxmlformats.org/officeDocument/2006/relationships" xmlns:a="http://schemas.openxmlformats.org/drawingml/2006/main" r:embed="Rd088cdc027604927"/>
           <a:stretch xmlns:a="http://schemas.openxmlformats.org/drawingml/2006/main">
             <a:fillRect l="0" t="0" r="0" b="0"/>
           </a:stretch>
@@ -9704,7 +9628,7 @@
           <p:nvPr/>
         </p:nvPicPr>
         <p:blipFill>
-          <a:blip xmlns:r="http://schemas.openxmlformats.org/officeDocument/2006/relationships" xmlns:a="http://schemas.openxmlformats.org/drawingml/2006/main" r:embed="R0c5aff74585f4cd5"/>
+          <a:blip xmlns:r="http://schemas.openxmlformats.org/officeDocument/2006/relationships" xmlns:a="http://schemas.openxmlformats.org/drawingml/2006/main" r:embed="Re04f7f8e0e764c7e"/>
           <a:stretch xmlns:a="http://schemas.openxmlformats.org/drawingml/2006/main">
             <a:fillRect l="0" t="0" r="0" b="0"/>
           </a:stretch>
@@ -10909,7 +10833,7 @@
           <p:nvPr/>
         </p:nvPicPr>
         <p:blipFill>
-          <a:blip xmlns:r="http://schemas.openxmlformats.org/officeDocument/2006/relationships" xmlns:a="http://schemas.openxmlformats.org/drawingml/2006/main" r:embed="Re21187a604704616"/>
+          <a:blip xmlns:r="http://schemas.openxmlformats.org/officeDocument/2006/relationships" xmlns:a="http://schemas.openxmlformats.org/drawingml/2006/main" r:embed="R86f0c330547a4c40"/>
           <a:stretch xmlns:a="http://schemas.openxmlformats.org/drawingml/2006/main">
             <a:fillRect l="0" t="0" r="0" b="0"/>
           </a:stretch>
@@ -11188,7 +11112,7 @@
           <p:nvPr/>
         </p:nvPicPr>
         <p:blipFill>
-          <a:blip xmlns:r="http://schemas.openxmlformats.org/officeDocument/2006/relationships" xmlns:a="http://schemas.openxmlformats.org/drawingml/2006/main" r:embed="Rdd31e7c141c34a97"/>
+          <a:blip xmlns:r="http://schemas.openxmlformats.org/officeDocument/2006/relationships" xmlns:a="http://schemas.openxmlformats.org/drawingml/2006/main" r:embed="Rc9023f7d33b34a46"/>
           <a:stretch xmlns:a="http://schemas.openxmlformats.org/drawingml/2006/main">
             <a:fillRect l="0" t="0" r="0" b="0"/>
           </a:stretch>
@@ -12733,7 +12657,7 @@
           <p:nvPr/>
         </p:nvPicPr>
         <p:blipFill>
-          <a:blip xmlns:r="http://schemas.openxmlformats.org/officeDocument/2006/relationships" xmlns:a="http://schemas.openxmlformats.org/drawingml/2006/main" r:embed="Re3b575b2919c41e0"/>
+          <a:blip xmlns:r="http://schemas.openxmlformats.org/officeDocument/2006/relationships" xmlns:a="http://schemas.openxmlformats.org/drawingml/2006/main" r:embed="R558564d8d8ef4e4e"/>
           <a:stretch xmlns:a="http://schemas.openxmlformats.org/drawingml/2006/main">
             <a:fillRect l="0" t="0" r="0" b="0"/>
           </a:stretch>
@@ -14750,7 +14674,7 @@
           <p:nvPr/>
         </p:nvPicPr>
         <p:blipFill>
-          <a:blip xmlns:r="http://schemas.openxmlformats.org/officeDocument/2006/relationships" xmlns:a="http://schemas.openxmlformats.org/drawingml/2006/main" r:embed="R3513f71367924053"/>
+          <a:blip xmlns:r="http://schemas.openxmlformats.org/officeDocument/2006/relationships" xmlns:a="http://schemas.openxmlformats.org/drawingml/2006/main" r:embed="Ra886e133b4084a49"/>
           <a:stretch xmlns:a="http://schemas.openxmlformats.org/drawingml/2006/main">
             <a:fillRect l="0" t="0" r="0" b="0"/>
           </a:stretch>
@@ -15977,7 +15901,7 @@
           <p:nvPr/>
         </p:nvPicPr>
         <p:blipFill>
-          <a:blip xmlns:r="http://schemas.openxmlformats.org/officeDocument/2006/relationships" xmlns:a="http://schemas.openxmlformats.org/drawingml/2006/main" r:embed="R9e73b7867c8541ec"/>
+          <a:blip xmlns:r="http://schemas.openxmlformats.org/officeDocument/2006/relationships" xmlns:a="http://schemas.openxmlformats.org/drawingml/2006/main" r:embed="Rc28bd557db884c2a"/>
           <a:stretch xmlns:a="http://schemas.openxmlformats.org/drawingml/2006/main">
             <a:fillRect l="0" t="0" r="0" b="0"/>
           </a:stretch>
@@ -17118,7 +17042,7 @@
           <p:nvPr/>
         </p:nvPicPr>
         <p:blipFill>
-          <a:blip xmlns:r="http://schemas.openxmlformats.org/officeDocument/2006/relationships" xmlns:a="http://schemas.openxmlformats.org/drawingml/2006/main" r:embed="Ra624fa77e78a4361"/>
+          <a:blip xmlns:r="http://schemas.openxmlformats.org/officeDocument/2006/relationships" xmlns:a="http://schemas.openxmlformats.org/drawingml/2006/main" r:embed="Ra86e96361134446f"/>
           <a:stretch xmlns:a="http://schemas.openxmlformats.org/drawingml/2006/main">
             <a:fillRect l="0" t="0" r="0" b="0"/>
           </a:stretch>
@@ -18583,7 +18507,7 @@
           <p:nvPr/>
         </p:nvPicPr>
         <p:blipFill>
-          <a:blip xmlns:r="http://schemas.openxmlformats.org/officeDocument/2006/relationships" xmlns:a="http://schemas.openxmlformats.org/drawingml/2006/main" r:embed="Rca4fcc211163455e"/>
+          <a:blip xmlns:r="http://schemas.openxmlformats.org/officeDocument/2006/relationships" xmlns:a="http://schemas.openxmlformats.org/drawingml/2006/main" r:embed="R37458189867e4ee1"/>
           <a:stretch xmlns:a="http://schemas.openxmlformats.org/drawingml/2006/main">
             <a:fillRect l="0" t="0" r="0" b="0"/>
           </a:stretch>
@@ -18729,7 +18653,7 @@
           <p:nvPr/>
         </p:nvPicPr>
         <p:blipFill>
-          <a:blip xmlns:r="http://schemas.openxmlformats.org/officeDocument/2006/relationships" xmlns:a="http://schemas.openxmlformats.org/drawingml/2006/main" r:embed="R7a5d5572ec1c459f"/>
+          <a:blip xmlns:r="http://schemas.openxmlformats.org/officeDocument/2006/relationships" xmlns:a="http://schemas.openxmlformats.org/drawingml/2006/main" r:embed="Re056db448fb24c40"/>
           <a:stretch xmlns:a="http://schemas.openxmlformats.org/drawingml/2006/main">
             <a:fillRect l="0" t="0" r="0" b="0"/>
           </a:stretch>
@@ -18833,7 +18757,7 @@
                 <a:ea typeface="Aptos Display"/>
                 <a:cs typeface="Aptos Display"/>
               </a:rPr>
-              <a:t>Dari data menuju</a:t>
+              <a:t>AI mempercepat proses,</a:t>
             </a:r>
           </a:p>
           <a:p xmlns:a="http://schemas.openxmlformats.org/drawingml/2006/main">
@@ -18849,7 +18773,7 @@
                 <a:ea typeface="Aptos Display"/>
                 <a:cs typeface="Aptos Display"/>
               </a:rPr>
-              <a:t>keputusan yang dapat diuji</a:t>
+              <a:t>penalaran tetap memimpin</a:t>
             </a:r>
           </a:p>
         </p:txBody>
@@ -18916,7 +18840,7 @@
         </p:spPr>
         <p:txBody>
           <a:bodyPr xmlns:a="http://schemas.openxmlformats.org/drawingml/2006/main" wrap="square" lIns="635" tIns="635" rIns="635" bIns="635" anchor="t">
-            <a:normAutofit fontScale="100000"/>
+            <a:normAutofit fontScale="90912"/>
           </a:bodyPr>
           <a:lstStyle xmlns:a="http://schemas.openxmlformats.org/drawingml/2006/main"/>
           <a:p xmlns:a="http://schemas.openxmlformats.org/drawingml/2006/main">
@@ -18932,7 +18856,7 @@
                 <a:ea typeface="Aptos"/>
                 <a:cs typeface="Aptos"/>
               </a:rPr>
-              <a:t>Nonparametrik &amp; Model menghubungkan teori, data, metode, validasi, dan komunikasi untuk menghasilkan keputusan yang sahih, dapat direplikasi, dan bertanggung jawab.</a:t>
+              <a:t>Statistika Nonparametrik Pemodelan Fleksibel memadukan teori, data, komputasi, validasi, dan komunikasi. AI mempercepat eksplorasi dan pemeriksaan awal; mahasiswa tetap memverifikasi asumsi, kode, hasil numerik, ketidakpastian, sumber, dan dampak sebelum mengambil keputusan.</a:t>
             </a:r>
           </a:p>
         </p:txBody>
@@ -19102,7 +19026,7 @@
           <p:nvPr/>
         </p:nvPicPr>
         <p:blipFill>
-          <a:blip xmlns:r="http://schemas.openxmlformats.org/officeDocument/2006/relationships" xmlns:a="http://schemas.openxmlformats.org/drawingml/2006/main" r:embed="Re053b23eda8f4b07"/>
+          <a:blip xmlns:r="http://schemas.openxmlformats.org/officeDocument/2006/relationships" xmlns:a="http://schemas.openxmlformats.org/drawingml/2006/main" r:embed="Rfb09d4b84ba0492c"/>
           <a:stretch xmlns:a="http://schemas.openxmlformats.org/drawingml/2006/main">
             <a:fillRect l="0" t="0" r="0" b="0"/>
           </a:stretch>
@@ -20233,7 +20157,7 @@
           <p:nvPr/>
         </p:nvPicPr>
         <p:blipFill>
-          <a:blip xmlns:r="http://schemas.openxmlformats.org/officeDocument/2006/relationships" xmlns:a="http://schemas.openxmlformats.org/drawingml/2006/main" r:embed="R68867701692e45b0"/>
+          <a:blip xmlns:r="http://schemas.openxmlformats.org/officeDocument/2006/relationships" xmlns:a="http://schemas.openxmlformats.org/drawingml/2006/main" r:embed="Ra6e59f914d6949df"/>
           <a:stretch xmlns:a="http://schemas.openxmlformats.org/drawingml/2006/main">
             <a:fillRect l="0" t="0" r="0" b="0"/>
           </a:stretch>
@@ -22337,7 +22261,7 @@
           <p:nvPr/>
         </p:nvPicPr>
         <p:blipFill>
-          <a:blip xmlns:r="http://schemas.openxmlformats.org/officeDocument/2006/relationships" xmlns:a="http://schemas.openxmlformats.org/drawingml/2006/main" r:embed="R2389dd7d094b455d"/>
+          <a:blip xmlns:r="http://schemas.openxmlformats.org/officeDocument/2006/relationships" xmlns:a="http://schemas.openxmlformats.org/drawingml/2006/main" r:embed="R850500a6166e400f"/>
           <a:stretch xmlns:a="http://schemas.openxmlformats.org/drawingml/2006/main">
             <a:fillRect l="0" t="0" r="0" b="0"/>
           </a:stretch>
@@ -23619,7 +23543,7 @@
           <p:nvPr/>
         </p:nvPicPr>
         <p:blipFill>
-          <a:blip xmlns:r="http://schemas.openxmlformats.org/officeDocument/2006/relationships" xmlns:a="http://schemas.openxmlformats.org/drawingml/2006/main" r:embed="Rc1b08cd8bb924cdf"/>
+          <a:blip xmlns:r="http://schemas.openxmlformats.org/officeDocument/2006/relationships" xmlns:a="http://schemas.openxmlformats.org/drawingml/2006/main" r:embed="R2309a4fe0faa4054"/>
           <a:stretch xmlns:a="http://schemas.openxmlformats.org/drawingml/2006/main">
             <a:fillRect l="0" t="0" r="0" b="0"/>
           </a:stretch>
@@ -23898,7 +23822,7 @@
           <p:nvPr/>
         </p:nvPicPr>
         <p:blipFill>
-          <a:blip xmlns:r="http://schemas.openxmlformats.org/officeDocument/2006/relationships" xmlns:a="http://schemas.openxmlformats.org/drawingml/2006/main" r:embed="R82d55c9b945c4785"/>
+          <a:blip xmlns:r="http://schemas.openxmlformats.org/officeDocument/2006/relationships" xmlns:a="http://schemas.openxmlformats.org/drawingml/2006/main" r:embed="Rbb392336ffbe4b93"/>
           <a:stretch xmlns:a="http://schemas.openxmlformats.org/drawingml/2006/main">
             <a:fillRect l="0" t="0" r="0" b="0"/>
           </a:stretch>
@@ -25978,7 +25902,7 @@
           <p:nvPr/>
         </p:nvPicPr>
         <p:blipFill>
-          <a:blip xmlns:r="http://schemas.openxmlformats.org/officeDocument/2006/relationships" xmlns:a="http://schemas.openxmlformats.org/drawingml/2006/main" r:embed="R78e5eee47cae4b3f"/>
+          <a:blip xmlns:r="http://schemas.openxmlformats.org/officeDocument/2006/relationships" xmlns:a="http://schemas.openxmlformats.org/drawingml/2006/main" r:embed="Rcf1d9a19be294373"/>
           <a:stretch xmlns:a="http://schemas.openxmlformats.org/drawingml/2006/main">
             <a:fillRect l="0" t="0" r="0" b="0"/>
           </a:stretch>
@@ -27391,7 +27315,7 @@
           <p:nvPr/>
         </p:nvPicPr>
         <p:blipFill>
-          <a:blip xmlns:r="http://schemas.openxmlformats.org/officeDocument/2006/relationships" xmlns:a="http://schemas.openxmlformats.org/drawingml/2006/main" r:embed="Ra29b998b32cb484e"/>
+          <a:blip xmlns:r="http://schemas.openxmlformats.org/officeDocument/2006/relationships" xmlns:a="http://schemas.openxmlformats.org/drawingml/2006/main" r:embed="Ree388ee48bc54ea5"/>
           <a:stretch xmlns:a="http://schemas.openxmlformats.org/drawingml/2006/main">
             <a:fillRect l="0" t="0" r="0" b="0"/>
           </a:stretch>
